--- a/presentation/final_defence_deck.pptx
+++ b/presentation/final_defence_deck.pptx
@@ -3152,7 +3152,7 @@
               </a:defRPr>
             </a:pPr>
             <a:r>
-              <a:t>Final Defence — Project 1, Group 3, CPEN 315/733</a:t>
+              <a:t>Final Defence — Project 1, Group 3, CPEN 438</a:t>
             </a:r>
           </a:p>
           <a:p>
@@ -3164,7 +3164,7 @@
               </a:defRPr>
             </a:pPr>
             <a:r>
-              <a:t>Samuel Kojo Anafi Antwi · Amponsah Jonathan Boadu · Kumi Kelvin Gyabaah · Obed Ninson</a:t>
+              <a:t>Samuel Kojo Anafi Antwi (11164744) · Amponsah Jonathan Boadu (11293871) · Kumi Kelvin Gyabaah (11012343) · Obed Ninson (11238291) · Theophilus Owusu-Manu (10985130)</a:t>
             </a:r>
           </a:p>
         </p:txBody>
